--- a/Presentation.pptx
+++ b/Presentation.pptx
@@ -3871,7 +3871,13 @@
             <a:br>
               <a:rPr lang="fr-FR" dirty="0"/>
             </a:br>
-            <a:endParaRPr lang="fr-FR" dirty="0"/>
+            <a:br>
+              <a:rPr lang="fr-FR" dirty="0"/>
+            </a:br>
+            <a:r>
+              <a:rPr lang="fr-FR" sz="2200" dirty="0"/>
+              <a:t>Lien AWS : http://16.16.78.34:5000</a:t>
+            </a:r>
           </a:p>
         </p:txBody>
       </p:sp>
